--- a/assets/readme/examples/linkedin-carousel.pptx
+++ b/assets/readme/examples/linkedin-carousel.pptx
@@ -8079,7 +8079,7 @@
                 </a:solidFill>
                 <a:latin typeface="Courier New"/>
               </a:rPr>
-              <a:t>GRAPHCOMPOSE 2.3</a:t>
+              <a:t>GRAPHCOMPOSE 2.4</a:t>
             </a:r>
             <a:endParaRPr lang="en-US" sz="1100"/>
           </a:p>
@@ -9100,7 +9100,7 @@
                 </a:solidFill>
                 <a:latin typeface="Courier New"/>
               </a:rPr>
-              <a:t>WHAT 2.3 ADDS</a:t>
+              <a:t>WHAT 2.4 ADDS</a:t>
             </a:r>
             <a:endParaRPr lang="en-US" sz="1100"/>
           </a:p>
